--- a/docs/答辩_工业维修智能化零件分配平台.pptx
+++ b/docs/答辩_工业维修智能化零件分配平台.pptx
@@ -4754,7 +4754,7 @@
                 </a:solidFill>
                 <a:latin typeface="微软雅黑"/>
               </a:rPr>
-              <a:t>WinForm + SunnyUI 3.9.8（UIForm/UIDataGridView/UIBarChart/UILineChart）· 异步照片准备</a:t>
+              <a:t>WinForm + SunnyUI 3.9.8（UIForm/UIDataGridView/UIBarChart/UILineChart）· 维护计划中心四Tab · 异步照片准备</a:t>
             </a:r>
           </a:p>
         </p:txBody>
@@ -4920,7 +4920,7 @@
                 </a:solidFill>
                 <a:latin typeface="微软雅黑"/>
               </a:rPr>
-              <a:t>认证(bcrypt/MFA) 工单 材料审阅 算料(BomCalculator 纯函数) 识别(IImageRecognizer) 串口(IScannerInput) MQTT</a:t>
+              <a:t>认证(bcrypt/MFA) 工单 材料审阅 算料 识别 串口 MQTT · PM调度(Quartz) EOQ优化 停机OEE 供应商</a:t>
             </a:r>
           </a:p>
         </p:txBody>
@@ -5086,7 +5086,7 @@
                 </a:solidFill>
                 <a:latin typeface="微软雅黑"/>
               </a:rPr>
-              <a:t>ADO.NET DbHelper：SqlParameter 全参数化 · RunInTransaction · ScriptRunner 版本化迁移</a:t>
+              <a:t>ADO.NET DbHelper：SqlParameter 全参数化 · RunInTransaction · ScriptRunner 版本化迁移(Schema v5)</a:t>
             </a:r>
           </a:p>
         </p:txBody>
@@ -5252,7 +5252,7 @@
                 </a:solidFill>
                 <a:latin typeface="微软雅黑"/>
               </a:rPr>
-              <a:t>实体与代码（MaterialReviewMode / RecognizeSource / Result 模式）</a:t>
+              <a:t>实体与代码（MaterialReviewMode / InventoryRecommendation / Result 模式）</a:t>
             </a:r>
           </a:p>
         </p:txBody>
@@ -5436,7 +5436,7 @@
                 </a:solidFill>
                 <a:latin typeface="微软雅黑"/>
               </a:rPr>
-              <a:t>数据库：17 表 · 11 过程 · 3 触发器 · 4 视图</a:t>
+              <a:t>数据库：21 表 · 14 过程 · 3 触发器 · 8 视图</a:t>
             </a:r>
           </a:p>
         </p:txBody>
@@ -5475,7 +5475,7 @@
                 </a:solidFill>
                 <a:latin typeface="微软雅黑"/>
               </a:rPr>
-              <a:t>版本化迁移 + 写入约束</a:t>
+              <a:t>版本化迁移（Schema v5）+ 写入约束</a:t>
             </a:r>
           </a:p>
         </p:txBody>
@@ -6095,7 +6095,7 @@
                 </a:solidFill>
                 <a:latin typeface="微软雅黑"/>
               </a:rPr>
-              <a:t>基线 v1 → 材料审阅 v2 → …（每版本单一事务）</a:t>
+              <a:t>基线 v1 → 材料审阅 v2 → 性能索引 v3 → 新功能 v4 → PM 关联 v5</a:t>
             </a:r>
           </a:p>
           <a:p>
@@ -6175,7 +6175,7 @@
                 </a:solidFill>
                 <a:latin typeface="微软雅黑"/>
               </a:rPr>
-              <a:t>验收：空库初始化 / 旧库升级（备份恢复演练，13 工单保留）/</a:t>
+              <a:t>验收：空库初始化 / 旧库增量升级（v4→v5 实测）/</a:t>
             </a:r>
           </a:p>
           <a:p>
@@ -7266,7 +7266,7 @@
                 </a:solidFill>
                 <a:latin typeface="微软雅黑"/>
               </a:rPr>
-              <a:t>32/32</a:t>
+              <a:t>138/138</a:t>
             </a:r>
           </a:p>
         </p:txBody>
@@ -7388,7 +7388,7 @@
                 </a:solidFill>
                 <a:latin typeface="微软雅黑"/>
               </a:rPr>
-              <a:t>58/58</a:t>
+              <a:t>82/82</a:t>
             </a:r>
           </a:p>
         </p:txBody>
@@ -8026,7 +8026,7 @@
                 </a:solidFill>
                 <a:latin typeface="微软雅黑"/>
               </a:rPr>
-              <a:t>开源集成与合规（8 个直接依赖）</a:t>
+              <a:t>开源集成与合规（17 个直接依赖）</a:t>
             </a:r>
           </a:p>
         </p:txBody>
@@ -8431,7 +8431,7 @@
                 </a:solidFill>
                 <a:latin typeface="微软雅黑"/>
               </a:rPr>
-              <a:t>QRCoder</a:t>
+              <a:t>Microsoft.ML.OnnxRuntime</a:t>
             </a:r>
           </a:p>
         </p:txBody>
@@ -8470,7 +8470,7 @@
                 </a:solidFill>
                 <a:latin typeface="微软雅黑"/>
               </a:rPr>
-              <a:t>二维码标签</a:t>
+              <a:t>课程模型后端</a:t>
             </a:r>
           </a:p>
         </p:txBody>
@@ -9075,7 +9075,7 @@
                 </a:solidFill>
                 <a:latin typeface="微软雅黑"/>
               </a:rPr>
-              <a:t>BCrypt.Net-Next</a:t>
+              <a:t>Quartz.NET 3.13</a:t>
             </a:r>
           </a:p>
         </p:txBody>
@@ -9114,7 +9114,7 @@
                 </a:solidFill>
                 <a:latin typeface="微软雅黑"/>
               </a:rPr>
-              <a:t>口令哈希</a:t>
+              <a:t>定时任务/PM调度</a:t>
             </a:r>
           </a:p>
         </p:txBody>
@@ -9153,7 +9153,7 @@
                 </a:solidFill>
                 <a:latin typeface="微软雅黑"/>
               </a:rPr>
-              <a:t>MIT</a:t>
+              <a:t>Apache-2.0</a:t>
             </a:r>
           </a:p>
         </p:txBody>
@@ -9236,7 +9236,7 @@
                 </a:solidFill>
                 <a:latin typeface="微软雅黑"/>
               </a:rPr>
-              <a:t>xunit</a:t>
+              <a:t>ScottPlot 5</a:t>
             </a:r>
           </a:p>
         </p:txBody>
@@ -9275,7 +9275,7 @@
                 </a:solidFill>
                 <a:latin typeface="微软雅黑"/>
               </a:rPr>
-              <a:t>单元测试</a:t>
+              <a:t>EOQ 交互图表</a:t>
             </a:r>
           </a:p>
         </p:txBody>
@@ -9314,7 +9314,7 @@
                 </a:solidFill>
                 <a:latin typeface="微软雅黑"/>
               </a:rPr>
-              <a:t>Apache-2.0</a:t>
+              <a:t>MIT</a:t>
             </a:r>
           </a:p>
         </p:txBody>
@@ -9347,13 +9347,13 @@
               </a:lnSpc>
             </a:pPr>
             <a:r>
-              <a:rPr sz="1250" b="0">
+              <a:rPr sz="1150" b="0">
                 <a:solidFill>
                   <a:srgbClr val="6E7A8A"/>
                 </a:solidFill>
                 <a:latin typeface="微软雅黑"/>
               </a:rPr>
-              <a:t>许可以官方 NuGet 元数据为准；SunnyUI 为 GPL-3.0-only（课设可用，商用发布需注意传染性）</a:t>
+              <a:t>另含 MailKit/QuestPDF/CsvHelper/Serilog/Polly/FluentValidation/FuzzySharp/Bogus/QRCoder/BCrypt.Net-Next；许可以官方 NuGet 元数据为准，SunnyUI 为 GPL-3.0-only（课设可用，商用需注意传染性）</a:t>
             </a:r>
           </a:p>
         </p:txBody>
@@ -9498,7 +9498,7 @@
                 </a:solidFill>
                 <a:latin typeface="微软雅黑"/>
               </a:rPr>
-              <a:t>物联网与集成亮点</a:t>
+              <a:t>维护智能化与集成亮点</a:t>
             </a:r>
           </a:p>
         </p:txBody>
@@ -9581,7 +9581,7 @@
                 </a:solidFill>
                 <a:latin typeface="微软雅黑"/>
               </a:rPr>
-              <a:t>串口扫码：IScannerInput 统一接口——真实串口/模拟器/图片扫码/手动录入同一「编码→配件」流程，帧协议 PART:编码</a:t>
+              <a:t>预防性维护 PM：Time/Meter 双模式调度，Quartz 每 30 分钟检查到期自动建工单，工单↔调度硬外键关联（Schema v5）</a:t>
             </a:r>
           </a:p>
         </p:txBody>
@@ -9664,7 +9664,7 @@
                 </a:solidFill>
                 <a:latin typeface="微软雅黑"/>
               </a:rPr>
-              <a:t>MQTT 遥测：MQTTnet 内嵌 Broker(127.0.0.1:18835)，factory/{id}/telemetry 温度/振动上屏</a:t>
+              <a:t>EOQ 库存优化：经济批量/再订购点/安全库存，首选供应商实际交期参与计算（无关联回退 14 天），ScottPlot 图表导出 PNG</a:t>
             </a:r>
           </a:p>
         </p:txBody>
@@ -9747,7 +9747,7 @@
                 </a:solidFill>
                 <a:latin typeface="微软雅黑"/>
               </a:rPr>
-              <a:t>越限自动报修：温度&gt;75℃ 或振动&gt;8.0 自动建 [IoT自动报修] 工单，10 分钟冷却防重复（冒烟确定性断言）</a:t>
+              <a:t>停机追踪 OEE：固定七类停机原因下拉，30 天可用率（Availability）计算与 Excel 导出</a:t>
             </a:r>
           </a:p>
         </p:txBody>
@@ -9830,7 +9830,7 @@
                 </a:solidFill>
                 <a:latin typeface="微软雅黑"/>
               </a:rPr>
-              <a:t>二维码闭环：QRCoder 生成 PART:编码 标签 → 报修照片/图片扫码经 ZXing 直达配件（扫码回环 6/6）</a:t>
+              <a:t>MQTT 遥测：内嵌 Broker(127.0.0.1:18835)，温度/振动越限自动建 [IoT自动报修] 工单（10 分钟冷却，冒烟确定性断言）</a:t>
             </a:r>
           </a:p>
         </p:txBody>
@@ -9913,7 +9913,7 @@
                 </a:solidFill>
                 <a:latin typeface="微软雅黑"/>
               </a:rPr>
-              <a:t>大屏与报表：UIBarChart/UILineChart + 低库存预警表；CSV(UTF-8 BOM) 导出对接山海鲸类外部大屏；Excel 报表</a:t>
+              <a:t>二维码闭环：QRCoder 生成 PART:编码 标签 → ZXing 解码直达配件（回环 6/6）；CSV/Excel 导出对接外部大屏</a:t>
             </a:r>
           </a:p>
         </p:txBody>

--- a/docs/答辩_工业维修智能化零件分配平台.pptx
+++ b/docs/答辩_工业维修智能化零件分配平台.pptx
@@ -3120,7 +3120,7 @@
             <a:avLst/>
           </a:prstGeom>
           <a:solidFill>
-            <a:srgbClr val="2A6CCA"/>
+            <a:srgbClr val="1870F0"/>
           </a:solidFill>
           <a:ln>
             <a:noFill/>
@@ -3403,7 +3403,7 @@
             <a:avLst/>
           </a:prstGeom>
           <a:solidFill>
-            <a:srgbClr val="2A6CCA"/>
+            <a:srgbClr val="1870F0"/>
           </a:solidFill>
           <a:ln>
             <a:noFill/>
@@ -3534,7 +3534,7 @@
           </a:solidFill>
           <a:ln>
             <a:solidFill>
-              <a:srgbClr val="2A6CCA"/>
+              <a:srgbClr val="1870F0"/>
             </a:solidFill>
           </a:ln>
           <a:effectLst/>
@@ -3591,7 +3591,7 @@
             <a:r>
               <a:rPr sz="2200" b="1">
                 <a:solidFill>
-                  <a:srgbClr val="2A6CCA"/>
+                  <a:srgbClr val="1870F0"/>
                 </a:solidFill>
                 <a:latin typeface="微软雅黑"/>
               </a:rPr>
@@ -3635,7 +3635,7 @@
           </a:solidFill>
           <a:ln>
             <a:solidFill>
-              <a:srgbClr val="2A6CCA"/>
+              <a:srgbClr val="1870F0"/>
             </a:solidFill>
           </a:ln>
           <a:effectLst/>
@@ -3692,7 +3692,7 @@
             <a:r>
               <a:rPr sz="2200" b="1">
                 <a:solidFill>
-                  <a:srgbClr val="2A6CCA"/>
+                  <a:srgbClr val="1870F0"/>
                 </a:solidFill>
                 <a:latin typeface="微软雅黑"/>
               </a:rPr>
@@ -3736,7 +3736,7 @@
           </a:solidFill>
           <a:ln>
             <a:solidFill>
-              <a:srgbClr val="2A6CCA"/>
+              <a:srgbClr val="1870F0"/>
             </a:solidFill>
           </a:ln>
           <a:effectLst/>
@@ -3793,7 +3793,7 @@
             <a:r>
               <a:rPr sz="2200" b="1">
                 <a:solidFill>
-                  <a:srgbClr val="2A6CCA"/>
+                  <a:srgbClr val="1870F0"/>
                 </a:solidFill>
                 <a:latin typeface="微软雅黑"/>
               </a:rPr>
@@ -3837,7 +3837,7 @@
           </a:solidFill>
           <a:ln>
             <a:solidFill>
-              <a:srgbClr val="2A6CCA"/>
+              <a:srgbClr val="1870F0"/>
             </a:solidFill>
           </a:ln>
           <a:effectLst/>
@@ -3894,7 +3894,7 @@
             <a:r>
               <a:rPr sz="2200" b="1">
                 <a:solidFill>
-                  <a:srgbClr val="2A6CCA"/>
+                  <a:srgbClr val="1870F0"/>
                 </a:solidFill>
                 <a:latin typeface="微软雅黑"/>
               </a:rPr>
@@ -3938,7 +3938,7 @@
           </a:solidFill>
           <a:ln>
             <a:solidFill>
-              <a:srgbClr val="2A6CCA"/>
+              <a:srgbClr val="1870F0"/>
             </a:solidFill>
           </a:ln>
           <a:effectLst/>
@@ -3995,7 +3995,7 @@
             <a:r>
               <a:rPr sz="2200" b="1">
                 <a:solidFill>
-                  <a:srgbClr val="2A6CCA"/>
+                  <a:srgbClr val="1870F0"/>
                 </a:solidFill>
                 <a:latin typeface="微软雅黑"/>
               </a:rPr>
@@ -4039,7 +4039,7 @@
           </a:solidFill>
           <a:ln>
             <a:solidFill>
-              <a:srgbClr val="2A6CCA"/>
+              <a:srgbClr val="1870F0"/>
             </a:solidFill>
           </a:ln>
           <a:effectLst/>
@@ -4096,7 +4096,7 @@
             <a:r>
               <a:rPr sz="2200" b="1">
                 <a:solidFill>
-                  <a:srgbClr val="2A6CCA"/>
+                  <a:srgbClr val="1870F0"/>
                 </a:solidFill>
                 <a:latin typeface="微软雅黑"/>
               </a:rPr>
@@ -4136,7 +4136,7 @@
             <a:avLst/>
           </a:prstGeom>
           <a:solidFill>
-            <a:srgbClr val="2A6CCA"/>
+            <a:srgbClr val="1870F0"/>
           </a:solidFill>
           <a:ln>
             <a:noFill/>
@@ -4219,7 +4219,7 @@
             <a:avLst/>
           </a:prstGeom>
           <a:solidFill>
-            <a:srgbClr val="2A6CCA"/>
+            <a:srgbClr val="1870F0"/>
           </a:solidFill>
           <a:ln>
             <a:noFill/>
@@ -4302,7 +4302,7 @@
             <a:avLst/>
           </a:prstGeom>
           <a:solidFill>
-            <a:srgbClr val="2A6CCA"/>
+            <a:srgbClr val="1870F0"/>
           </a:solidFill>
           <a:ln>
             <a:noFill/>
@@ -4442,7 +4442,7 @@
             <a:avLst/>
           </a:prstGeom>
           <a:solidFill>
-            <a:srgbClr val="2A6CCA"/>
+            <a:srgbClr val="1870F0"/>
           </a:solidFill>
           <a:ln>
             <a:noFill/>
@@ -4608,7 +4608,7 @@
             <a:avLst/>
           </a:prstGeom>
           <a:solidFill>
-            <a:srgbClr val="2A6CCA"/>
+            <a:srgbClr val="1870F0"/>
           </a:solidFill>
           <a:ln>
             <a:noFill/>
@@ -4774,7 +4774,7 @@
             <a:avLst/>
           </a:prstGeom>
           <a:solidFill>
-            <a:srgbClr val="2A6CCA"/>
+            <a:srgbClr val="1870F0"/>
           </a:solidFill>
           <a:ln>
             <a:noFill/>
@@ -4940,7 +4940,7 @@
             <a:avLst/>
           </a:prstGeom>
           <a:solidFill>
-            <a:srgbClr val="2A6CCA"/>
+            <a:srgbClr val="1870F0"/>
           </a:solidFill>
           <a:ln>
             <a:noFill/>
@@ -5106,7 +5106,7 @@
             <a:avLst/>
           </a:prstGeom>
           <a:solidFill>
-            <a:srgbClr val="2A6CCA"/>
+            <a:srgbClr val="1870F0"/>
           </a:solidFill>
           <a:ln>
             <a:noFill/>
@@ -5329,7 +5329,7 @@
             <a:avLst/>
           </a:prstGeom>
           <a:solidFill>
-            <a:srgbClr val="2A6CCA"/>
+            <a:srgbClr val="1870F0"/>
           </a:solidFill>
           <a:ln>
             <a:noFill/>
@@ -5495,7 +5495,7 @@
             <a:avLst/>
           </a:prstGeom>
           <a:solidFill>
-            <a:srgbClr val="2A6CCA"/>
+            <a:srgbClr val="1870F0"/>
           </a:solidFill>
           <a:ln>
             <a:noFill/>
@@ -5578,7 +5578,7 @@
             <a:avLst/>
           </a:prstGeom>
           <a:solidFill>
-            <a:srgbClr val="2A6CCA"/>
+            <a:srgbClr val="1870F0"/>
           </a:solidFill>
           <a:ln>
             <a:noFill/>
@@ -5661,7 +5661,7 @@
             <a:avLst/>
           </a:prstGeom>
           <a:solidFill>
-            <a:srgbClr val="2A6CCA"/>
+            <a:srgbClr val="1870F0"/>
           </a:solidFill>
           <a:ln>
             <a:noFill/>
@@ -5744,7 +5744,7 @@
             <a:avLst/>
           </a:prstGeom>
           <a:solidFill>
-            <a:srgbClr val="2A6CCA"/>
+            <a:srgbClr val="1870F0"/>
           </a:solidFill>
           <a:ln>
             <a:noFill/>
@@ -5827,7 +5827,7 @@
             <a:avLst/>
           </a:prstGeom>
           <a:solidFill>
-            <a:srgbClr val="2A6CCA"/>
+            <a:srgbClr val="1870F0"/>
           </a:solidFill>
           <a:ln>
             <a:noFill/>
@@ -5910,7 +5910,7 @@
             <a:avLst/>
           </a:prstGeom>
           <a:solidFill>
-            <a:srgbClr val="2A6CCA"/>
+            <a:srgbClr val="1870F0"/>
           </a:solidFill>
           <a:ln>
             <a:noFill/>
@@ -6052,7 +6052,7 @@
             <a:r>
               <a:rPr sz="1500" b="1">
                 <a:solidFill>
-                  <a:srgbClr val="2A6CCA"/>
+                  <a:srgbClr val="1870F0"/>
                 </a:solidFill>
                 <a:latin typeface="微软雅黑"/>
               </a:rPr>
@@ -6229,7 +6229,7 @@
             <a:avLst/>
           </a:prstGeom>
           <a:solidFill>
-            <a:srgbClr val="2A6CCA"/>
+            <a:srgbClr val="1870F0"/>
           </a:solidFill>
           <a:ln>
             <a:noFill/>
@@ -6360,7 +6360,7 @@
           </a:solidFill>
           <a:ln>
             <a:solidFill>
-              <a:srgbClr val="2A6CCA"/>
+              <a:srgbClr val="1870F0"/>
             </a:solidFill>
           </a:ln>
           <a:effectLst/>
@@ -6417,7 +6417,7 @@
             <a:r>
               <a:rPr sz="1600" b="1">
                 <a:solidFill>
-                  <a:srgbClr val="2A6CCA"/>
+                  <a:srgbClr val="1870F0"/>
                 </a:solidFill>
                 <a:latin typeface="微软雅黑"/>
               </a:rPr>
@@ -6516,7 +6516,7 @@
           </a:solidFill>
           <a:ln>
             <a:solidFill>
-              <a:srgbClr val="2A6CCA"/>
+              <a:srgbClr val="1870F0"/>
             </a:solidFill>
           </a:ln>
           <a:effectLst/>
@@ -6573,7 +6573,7 @@
             <a:r>
               <a:rPr sz="1600" b="1">
                 <a:solidFill>
-                  <a:srgbClr val="2A6CCA"/>
+                  <a:srgbClr val="1870F0"/>
                 </a:solidFill>
                 <a:latin typeface="微软雅黑"/>
               </a:rPr>
@@ -6672,7 +6672,7 @@
           </a:solidFill>
           <a:ln>
             <a:solidFill>
-              <a:srgbClr val="2A6CCA"/>
+              <a:srgbClr val="1870F0"/>
             </a:solidFill>
           </a:ln>
           <a:effectLst/>
@@ -6729,7 +6729,7 @@
             <a:r>
               <a:rPr sz="1600" b="1">
                 <a:solidFill>
-                  <a:srgbClr val="2A6CCA"/>
+                  <a:srgbClr val="1870F0"/>
                 </a:solidFill>
                 <a:latin typeface="微软雅黑"/>
               </a:rPr>
@@ -6828,7 +6828,7 @@
           </a:solidFill>
           <a:ln>
             <a:solidFill>
-              <a:srgbClr val="2A6CCA"/>
+              <a:srgbClr val="1870F0"/>
             </a:solidFill>
           </a:ln>
           <a:effectLst/>
@@ -6885,7 +6885,7 @@
             <a:r>
               <a:rPr sz="1600" b="1">
                 <a:solidFill>
-                  <a:srgbClr val="2A6CCA"/>
+                  <a:srgbClr val="1870F0"/>
                 </a:solidFill>
                 <a:latin typeface="微软雅黑"/>
               </a:rPr>
@@ -6998,7 +6998,7 @@
             <a:avLst/>
           </a:prstGeom>
           <a:solidFill>
-            <a:srgbClr val="2A6CCA"/>
+            <a:srgbClr val="1870F0"/>
           </a:solidFill>
           <a:ln>
             <a:noFill/>
@@ -7164,7 +7164,7 @@
             <a:avLst/>
           </a:prstGeom>
           <a:solidFill>
-            <a:srgbClr val="2A6CCA"/>
+            <a:srgbClr val="1870F0"/>
           </a:solidFill>
           <a:ln>
             <a:noFill/>
@@ -7266,7 +7266,7 @@
                 </a:solidFill>
                 <a:latin typeface="微软雅黑"/>
               </a:rPr>
-              <a:t>138/138</a:t>
+              <a:t>169/169</a:t>
             </a:r>
           </a:p>
         </p:txBody>
@@ -7286,7 +7286,7 @@
             <a:avLst/>
           </a:prstGeom>
           <a:solidFill>
-            <a:srgbClr val="2A6CCA"/>
+            <a:srgbClr val="1870F0"/>
           </a:solidFill>
           <a:ln>
             <a:noFill/>
@@ -7388,7 +7388,7 @@
                 </a:solidFill>
                 <a:latin typeface="微软雅黑"/>
               </a:rPr>
-              <a:t>82/82</a:t>
+              <a:t>85/85</a:t>
             </a:r>
           </a:p>
         </p:txBody>
@@ -7408,7 +7408,7 @@
             <a:avLst/>
           </a:prstGeom>
           <a:solidFill>
-            <a:srgbClr val="2A6CCA"/>
+            <a:srgbClr val="1870F0"/>
           </a:solidFill>
           <a:ln>
             <a:noFill/>
@@ -7530,7 +7530,7 @@
             <a:avLst/>
           </a:prstGeom>
           <a:solidFill>
-            <a:srgbClr val="2A6CCA"/>
+            <a:srgbClr val="1870F0"/>
           </a:solidFill>
           <a:ln>
             <a:noFill/>
@@ -7652,7 +7652,7 @@
             <a:avLst/>
           </a:prstGeom>
           <a:solidFill>
-            <a:srgbClr val="2A6CCA"/>
+            <a:srgbClr val="1870F0"/>
           </a:solidFill>
           <a:ln>
             <a:noFill/>
@@ -7735,7 +7735,7 @@
             <a:avLst/>
           </a:prstGeom>
           <a:solidFill>
-            <a:srgbClr val="2A6CCA"/>
+            <a:srgbClr val="1870F0"/>
           </a:solidFill>
           <a:ln>
             <a:noFill/>
@@ -7818,7 +7818,7 @@
             <a:avLst/>
           </a:prstGeom>
           <a:solidFill>
-            <a:srgbClr val="2A6CCA"/>
+            <a:srgbClr val="1870F0"/>
           </a:solidFill>
           <a:ln>
             <a:noFill/>
@@ -7919,7 +7919,7 @@
             <a:avLst/>
           </a:prstGeom>
           <a:solidFill>
-            <a:srgbClr val="2A6CCA"/>
+            <a:srgbClr val="1870F0"/>
           </a:solidFill>
           <a:ln>
             <a:noFill/>
@@ -8183,7 +8183,7 @@
             <a:r>
               <a:rPr sz="1200" b="1">
                 <a:solidFill>
-                  <a:srgbClr val="2A6CCA"/>
+                  <a:srgbClr val="1870F0"/>
                 </a:solidFill>
                 <a:latin typeface="微软雅黑"/>
               </a:rPr>
@@ -9391,7 +9391,7 @@
             <a:avLst/>
           </a:prstGeom>
           <a:solidFill>
-            <a:srgbClr val="2A6CCA"/>
+            <a:srgbClr val="1870F0"/>
           </a:solidFill>
           <a:ln>
             <a:noFill/>
@@ -9518,7 +9518,7 @@
             <a:avLst/>
           </a:prstGeom>
           <a:solidFill>
-            <a:srgbClr val="2A6CCA"/>
+            <a:srgbClr val="1870F0"/>
           </a:solidFill>
           <a:ln>
             <a:noFill/>
@@ -9601,7 +9601,7 @@
             <a:avLst/>
           </a:prstGeom>
           <a:solidFill>
-            <a:srgbClr val="2A6CCA"/>
+            <a:srgbClr val="1870F0"/>
           </a:solidFill>
           <a:ln>
             <a:noFill/>
@@ -9684,7 +9684,7 @@
             <a:avLst/>
           </a:prstGeom>
           <a:solidFill>
-            <a:srgbClr val="2A6CCA"/>
+            <a:srgbClr val="1870F0"/>
           </a:solidFill>
           <a:ln>
             <a:noFill/>
@@ -9767,7 +9767,7 @@
             <a:avLst/>
           </a:prstGeom>
           <a:solidFill>
-            <a:srgbClr val="2A6CCA"/>
+            <a:srgbClr val="1870F0"/>
           </a:solidFill>
           <a:ln>
             <a:noFill/>
@@ -9850,7 +9850,7 @@
             <a:avLst/>
           </a:prstGeom>
           <a:solidFill>
-            <a:srgbClr val="2A6CCA"/>
+            <a:srgbClr val="1870F0"/>
           </a:solidFill>
           <a:ln>
             <a:noFill/>
@@ -9951,7 +9951,7 @@
             <a:avLst/>
           </a:prstGeom>
           <a:solidFill>
-            <a:srgbClr val="2A6CCA"/>
+            <a:srgbClr val="1870F0"/>
           </a:solidFill>
           <a:ln>
             <a:noFill/>
@@ -10137,7 +10137,7 @@
             <a:r>
               <a:rPr sz="1500" b="1">
                 <a:solidFill>
-                  <a:srgbClr val="2A6CCA"/>
+                  <a:srgbClr val="1870F0"/>
                 </a:solidFill>
                 <a:latin typeface="微软雅黑"/>
               </a:rPr>
@@ -10291,7 +10291,7 @@
             <a:r>
               <a:rPr sz="1500" b="1">
                 <a:solidFill>
-                  <a:srgbClr val="2A6CCA"/>
+                  <a:srgbClr val="1870F0"/>
                 </a:solidFill>
                 <a:latin typeface="微软雅黑"/>
               </a:rPr>
